--- a/testcases/text-missing-font.pptx
+++ b/testcases/text-missing-font.pptx
@@ -129,7 +129,7 @@
           <p:cNvPr id="2" name="标题 1">
             <a:extLst>
               <a:ext uri="{FF2B5EF4-FFF2-40B4-BE49-F238E27FC236}">
-                <a16:creationId xmlns:a16="http://schemas.microsoft.com/office/drawing/2014/main" id="{9C25E1A1-1433-B8BF-7476-AF6572367FF5}"/>
+                <a16:creationId xmlns:a16="http://schemas.microsoft.com/office/drawing/2014/main" id="{004C8968-18E2-22CC-52ED-DABCA070558B}"/>
               </a:ext>
             </a:extLst>
           </p:cNvPr>
@@ -166,7 +166,7 @@
           <p:cNvPr id="3" name="副标题 2">
             <a:extLst>
               <a:ext uri="{FF2B5EF4-FFF2-40B4-BE49-F238E27FC236}">
-                <a16:creationId xmlns:a16="http://schemas.microsoft.com/office/drawing/2014/main" id="{48B90282-D354-C937-5052-A207BE6C4073}"/>
+                <a16:creationId xmlns:a16="http://schemas.microsoft.com/office/drawing/2014/main" id="{65A5DD48-977C-6719-8F6C-C725F35054CA}"/>
               </a:ext>
             </a:extLst>
           </p:cNvPr>
@@ -236,7 +236,7 @@
           <p:cNvPr id="4" name="日期占位符 3">
             <a:extLst>
               <a:ext uri="{FF2B5EF4-FFF2-40B4-BE49-F238E27FC236}">
-                <a16:creationId xmlns:a16="http://schemas.microsoft.com/office/drawing/2014/main" id="{DD490FE8-A9FD-5915-B47F-5B80D1622E3F}"/>
+                <a16:creationId xmlns:a16="http://schemas.microsoft.com/office/drawing/2014/main" id="{E2816A38-B732-0719-9E70-C1BA4CD01706}"/>
               </a:ext>
             </a:extLst>
           </p:cNvPr>
@@ -252,7 +252,7 @@
           <a:bodyPr/>
           <a:lstStyle/>
           <a:p>
-            <a:fld id="{D45B5228-157C-4A61-B94F-7D39B61223F1}" type="datetimeFigureOut">
+            <a:fld id="{E153FE9F-3FEF-41E5-957E-25BB9AEA9EB6}" type="datetimeFigureOut">
               <a:rPr lang="zh-CN" altLang="en-US" smtClean="0"/>
               <a:t>2026/10/12</a:t>
             </a:fld>
@@ -265,7 +265,7 @@
           <p:cNvPr id="5" name="页脚占位符 4">
             <a:extLst>
               <a:ext uri="{FF2B5EF4-FFF2-40B4-BE49-F238E27FC236}">
-                <a16:creationId xmlns:a16="http://schemas.microsoft.com/office/drawing/2014/main" id="{CDC05B4A-E769-EF0A-445B-EF8770AAD609}"/>
+                <a16:creationId xmlns:a16="http://schemas.microsoft.com/office/drawing/2014/main" id="{E91914BB-02A1-55D1-94C0-55555CC5F98C}"/>
               </a:ext>
             </a:extLst>
           </p:cNvPr>
@@ -290,7 +290,7 @@
           <p:cNvPr id="6" name="灯片编号占位符 5">
             <a:extLst>
               <a:ext uri="{FF2B5EF4-FFF2-40B4-BE49-F238E27FC236}">
-                <a16:creationId xmlns:a16="http://schemas.microsoft.com/office/drawing/2014/main" id="{5222DE4E-CAD5-6E61-4335-04654803D5A0}"/>
+                <a16:creationId xmlns:a16="http://schemas.microsoft.com/office/drawing/2014/main" id="{BB451602-6CC2-3632-1070-8283F79AEB62}"/>
               </a:ext>
             </a:extLst>
           </p:cNvPr>
@@ -306,7 +306,7 @@
           <a:bodyPr/>
           <a:lstStyle/>
           <a:p>
-            <a:fld id="{00784516-1282-408B-B9C0-B358D54563E8}" type="slidenum">
+            <a:fld id="{AE1AC3C7-DE78-4B4F-A494-48BC2575B6AF}" type="slidenum">
               <a:rPr lang="zh-CN" altLang="en-US" smtClean="0"/>
               <a:t>‹#›</a:t>
             </a:fld>
@@ -317,7 +317,7 @@
     </p:spTree>
     <p:extLst>
       <p:ext uri="{BB962C8B-B14F-4D97-AF65-F5344CB8AC3E}">
-        <p14:creationId xmlns:p14="http://schemas.microsoft.com/office/powerpoint/2010/main" val="1346341459"/>
+        <p14:creationId xmlns:p14="http://schemas.microsoft.com/office/powerpoint/2010/main" val="3175364621"/>
       </p:ext>
     </p:extLst>
   </p:cSld>
@@ -349,7 +349,7 @@
           <p:cNvPr id="2" name="标题 1">
             <a:extLst>
               <a:ext uri="{FF2B5EF4-FFF2-40B4-BE49-F238E27FC236}">
-                <a16:creationId xmlns:a16="http://schemas.microsoft.com/office/drawing/2014/main" id="{F9AD375C-96B2-6616-5295-3ADB6B1BE1F6}"/>
+                <a16:creationId xmlns:a16="http://schemas.microsoft.com/office/drawing/2014/main" id="{333FB912-C92F-A4EB-ED99-8AAC2FCF3520}"/>
               </a:ext>
             </a:extLst>
           </p:cNvPr>
@@ -377,7 +377,7 @@
           <p:cNvPr id="3" name="竖排文字占位符 2">
             <a:extLst>
               <a:ext uri="{FF2B5EF4-FFF2-40B4-BE49-F238E27FC236}">
-                <a16:creationId xmlns:a16="http://schemas.microsoft.com/office/drawing/2014/main" id="{756B7EE3-3ADE-EC4B-19D1-5A68CA8CEC8D}"/>
+                <a16:creationId xmlns:a16="http://schemas.microsoft.com/office/drawing/2014/main" id="{F445A28C-1AAA-D35E-6CAD-76BA3B544A09}"/>
               </a:ext>
             </a:extLst>
           </p:cNvPr>
@@ -434,7 +434,7 @@
           <p:cNvPr id="4" name="日期占位符 3">
             <a:extLst>
               <a:ext uri="{FF2B5EF4-FFF2-40B4-BE49-F238E27FC236}">
-                <a16:creationId xmlns:a16="http://schemas.microsoft.com/office/drawing/2014/main" id="{15B138C7-96FF-E7E2-7628-13297CFD1C14}"/>
+                <a16:creationId xmlns:a16="http://schemas.microsoft.com/office/drawing/2014/main" id="{B5B4A808-66B8-1DC5-4FBF-4F97D0BFCA32}"/>
               </a:ext>
             </a:extLst>
           </p:cNvPr>
@@ -450,7 +450,7 @@
           <a:bodyPr/>
           <a:lstStyle/>
           <a:p>
-            <a:fld id="{D45B5228-157C-4A61-B94F-7D39B61223F1}" type="datetimeFigureOut">
+            <a:fld id="{E153FE9F-3FEF-41E5-957E-25BB9AEA9EB6}" type="datetimeFigureOut">
               <a:rPr lang="zh-CN" altLang="en-US" smtClean="0"/>
               <a:t>2026/10/12</a:t>
             </a:fld>
@@ -463,7 +463,7 @@
           <p:cNvPr id="5" name="页脚占位符 4">
             <a:extLst>
               <a:ext uri="{FF2B5EF4-FFF2-40B4-BE49-F238E27FC236}">
-                <a16:creationId xmlns:a16="http://schemas.microsoft.com/office/drawing/2014/main" id="{A4609BDF-AE81-399D-8034-1B58997167EE}"/>
+                <a16:creationId xmlns:a16="http://schemas.microsoft.com/office/drawing/2014/main" id="{AB48FAF0-3A4B-57C5-FED4-22009D491F56}"/>
               </a:ext>
             </a:extLst>
           </p:cNvPr>
@@ -488,7 +488,7 @@
           <p:cNvPr id="6" name="灯片编号占位符 5">
             <a:extLst>
               <a:ext uri="{FF2B5EF4-FFF2-40B4-BE49-F238E27FC236}">
-                <a16:creationId xmlns:a16="http://schemas.microsoft.com/office/drawing/2014/main" id="{0CE925A1-FE20-C358-0E56-928BF38F83B7}"/>
+                <a16:creationId xmlns:a16="http://schemas.microsoft.com/office/drawing/2014/main" id="{4795F6AC-6AC9-843C-67CA-154658C214E4}"/>
               </a:ext>
             </a:extLst>
           </p:cNvPr>
@@ -504,7 +504,7 @@
           <a:bodyPr/>
           <a:lstStyle/>
           <a:p>
-            <a:fld id="{00784516-1282-408B-B9C0-B358D54563E8}" type="slidenum">
+            <a:fld id="{AE1AC3C7-DE78-4B4F-A494-48BC2575B6AF}" type="slidenum">
               <a:rPr lang="zh-CN" altLang="en-US" smtClean="0"/>
               <a:t>‹#›</a:t>
             </a:fld>
@@ -515,7 +515,7 @@
     </p:spTree>
     <p:extLst>
       <p:ext uri="{BB962C8B-B14F-4D97-AF65-F5344CB8AC3E}">
-        <p14:creationId xmlns:p14="http://schemas.microsoft.com/office/powerpoint/2010/main" val="3332348453"/>
+        <p14:creationId xmlns:p14="http://schemas.microsoft.com/office/powerpoint/2010/main" val="3376689353"/>
       </p:ext>
     </p:extLst>
   </p:cSld>
@@ -547,7 +547,7 @@
           <p:cNvPr id="2" name="竖排标题 1">
             <a:extLst>
               <a:ext uri="{FF2B5EF4-FFF2-40B4-BE49-F238E27FC236}">
-                <a16:creationId xmlns:a16="http://schemas.microsoft.com/office/drawing/2014/main" id="{CD91BDC6-05AF-310F-7DC6-B7EA34264382}"/>
+                <a16:creationId xmlns:a16="http://schemas.microsoft.com/office/drawing/2014/main" id="{26E8E368-1D37-CD97-78E2-F6FED4BFDE80}"/>
               </a:ext>
             </a:extLst>
           </p:cNvPr>
@@ -580,7 +580,7 @@
           <p:cNvPr id="3" name="竖排文字占位符 2">
             <a:extLst>
               <a:ext uri="{FF2B5EF4-FFF2-40B4-BE49-F238E27FC236}">
-                <a16:creationId xmlns:a16="http://schemas.microsoft.com/office/drawing/2014/main" id="{32EC615B-88AE-66E7-FA55-D741B6CB0DAC}"/>
+                <a16:creationId xmlns:a16="http://schemas.microsoft.com/office/drawing/2014/main" id="{16C312AB-7507-BDBF-7090-DB285753FC7B}"/>
               </a:ext>
             </a:extLst>
           </p:cNvPr>
@@ -642,7 +642,7 @@
           <p:cNvPr id="4" name="日期占位符 3">
             <a:extLst>
               <a:ext uri="{FF2B5EF4-FFF2-40B4-BE49-F238E27FC236}">
-                <a16:creationId xmlns:a16="http://schemas.microsoft.com/office/drawing/2014/main" id="{953B1CA1-6243-DF55-6219-60A989875045}"/>
+                <a16:creationId xmlns:a16="http://schemas.microsoft.com/office/drawing/2014/main" id="{0AEE0A24-1323-67C7-B127-4EB3A007C4F3}"/>
               </a:ext>
             </a:extLst>
           </p:cNvPr>
@@ -658,7 +658,7 @@
           <a:bodyPr/>
           <a:lstStyle/>
           <a:p>
-            <a:fld id="{D45B5228-157C-4A61-B94F-7D39B61223F1}" type="datetimeFigureOut">
+            <a:fld id="{E153FE9F-3FEF-41E5-957E-25BB9AEA9EB6}" type="datetimeFigureOut">
               <a:rPr lang="zh-CN" altLang="en-US" smtClean="0"/>
               <a:t>2026/10/12</a:t>
             </a:fld>
@@ -671,7 +671,7 @@
           <p:cNvPr id="5" name="页脚占位符 4">
             <a:extLst>
               <a:ext uri="{FF2B5EF4-FFF2-40B4-BE49-F238E27FC236}">
-                <a16:creationId xmlns:a16="http://schemas.microsoft.com/office/drawing/2014/main" id="{4A3DF734-4631-B20F-9800-31CAF4C99EAF}"/>
+                <a16:creationId xmlns:a16="http://schemas.microsoft.com/office/drawing/2014/main" id="{F3A78502-D915-649C-3D1B-494D754FF14B}"/>
               </a:ext>
             </a:extLst>
           </p:cNvPr>
@@ -696,7 +696,7 @@
           <p:cNvPr id="6" name="灯片编号占位符 5">
             <a:extLst>
               <a:ext uri="{FF2B5EF4-FFF2-40B4-BE49-F238E27FC236}">
-                <a16:creationId xmlns:a16="http://schemas.microsoft.com/office/drawing/2014/main" id="{A26546C8-5E58-ED24-A097-5F2AEE30DC59}"/>
+                <a16:creationId xmlns:a16="http://schemas.microsoft.com/office/drawing/2014/main" id="{C09E6A95-7D3E-624A-406A-861AD0B4DAE6}"/>
               </a:ext>
             </a:extLst>
           </p:cNvPr>
@@ -712,7 +712,7 @@
           <a:bodyPr/>
           <a:lstStyle/>
           <a:p>
-            <a:fld id="{00784516-1282-408B-B9C0-B358D54563E8}" type="slidenum">
+            <a:fld id="{AE1AC3C7-DE78-4B4F-A494-48BC2575B6AF}" type="slidenum">
               <a:rPr lang="zh-CN" altLang="en-US" smtClean="0"/>
               <a:t>‹#›</a:t>
             </a:fld>
@@ -723,7 +723,7 @@
     </p:spTree>
     <p:extLst>
       <p:ext uri="{BB962C8B-B14F-4D97-AF65-F5344CB8AC3E}">
-        <p14:creationId xmlns:p14="http://schemas.microsoft.com/office/powerpoint/2010/main" val="2665282208"/>
+        <p14:creationId xmlns:p14="http://schemas.microsoft.com/office/powerpoint/2010/main" val="617916310"/>
       </p:ext>
     </p:extLst>
   </p:cSld>
@@ -755,7 +755,7 @@
           <p:cNvPr id="2" name="标题 1">
             <a:extLst>
               <a:ext uri="{FF2B5EF4-FFF2-40B4-BE49-F238E27FC236}">
-                <a16:creationId xmlns:a16="http://schemas.microsoft.com/office/drawing/2014/main" id="{C5EBBD7F-33EA-49EF-990C-926B841F7F33}"/>
+                <a16:creationId xmlns:a16="http://schemas.microsoft.com/office/drawing/2014/main" id="{A48FDFCC-6655-46A4-5DD4-C36B3FFB66DD}"/>
               </a:ext>
             </a:extLst>
           </p:cNvPr>
@@ -783,7 +783,7 @@
           <p:cNvPr id="3" name="内容占位符 2">
             <a:extLst>
               <a:ext uri="{FF2B5EF4-FFF2-40B4-BE49-F238E27FC236}">
-                <a16:creationId xmlns:a16="http://schemas.microsoft.com/office/drawing/2014/main" id="{E9619C75-E509-7822-4011-D0274D23B8C6}"/>
+                <a16:creationId xmlns:a16="http://schemas.microsoft.com/office/drawing/2014/main" id="{3759EF86-A8E2-6804-D0DA-BC35A1D9CEFB}"/>
               </a:ext>
             </a:extLst>
           </p:cNvPr>
@@ -840,7 +840,7 @@
           <p:cNvPr id="4" name="日期占位符 3">
             <a:extLst>
               <a:ext uri="{FF2B5EF4-FFF2-40B4-BE49-F238E27FC236}">
-                <a16:creationId xmlns:a16="http://schemas.microsoft.com/office/drawing/2014/main" id="{90DBC900-C65D-4206-FA3F-7DE4DC7DD99B}"/>
+                <a16:creationId xmlns:a16="http://schemas.microsoft.com/office/drawing/2014/main" id="{204AAA14-9AB6-8643-0182-F3E7B5D476B2}"/>
               </a:ext>
             </a:extLst>
           </p:cNvPr>
@@ -856,7 +856,7 @@
           <a:bodyPr/>
           <a:lstStyle/>
           <a:p>
-            <a:fld id="{D45B5228-157C-4A61-B94F-7D39B61223F1}" type="datetimeFigureOut">
+            <a:fld id="{E153FE9F-3FEF-41E5-957E-25BB9AEA9EB6}" type="datetimeFigureOut">
               <a:rPr lang="zh-CN" altLang="en-US" smtClean="0"/>
               <a:t>2026/10/12</a:t>
             </a:fld>
@@ -869,7 +869,7 @@
           <p:cNvPr id="5" name="页脚占位符 4">
             <a:extLst>
               <a:ext uri="{FF2B5EF4-FFF2-40B4-BE49-F238E27FC236}">
-                <a16:creationId xmlns:a16="http://schemas.microsoft.com/office/drawing/2014/main" id="{7C12933F-468F-BB9C-5A70-E7451A825709}"/>
+                <a16:creationId xmlns:a16="http://schemas.microsoft.com/office/drawing/2014/main" id="{6C0EA452-3A25-5B34-A760-88359CF0A400}"/>
               </a:ext>
             </a:extLst>
           </p:cNvPr>
@@ -894,7 +894,7 @@
           <p:cNvPr id="6" name="灯片编号占位符 5">
             <a:extLst>
               <a:ext uri="{FF2B5EF4-FFF2-40B4-BE49-F238E27FC236}">
-                <a16:creationId xmlns:a16="http://schemas.microsoft.com/office/drawing/2014/main" id="{28754273-6C02-A778-4536-0D51297906E2}"/>
+                <a16:creationId xmlns:a16="http://schemas.microsoft.com/office/drawing/2014/main" id="{7567656E-AEF7-C815-8237-D44D06D8CC65}"/>
               </a:ext>
             </a:extLst>
           </p:cNvPr>
@@ -910,7 +910,7 @@
           <a:bodyPr/>
           <a:lstStyle/>
           <a:p>
-            <a:fld id="{00784516-1282-408B-B9C0-B358D54563E8}" type="slidenum">
+            <a:fld id="{AE1AC3C7-DE78-4B4F-A494-48BC2575B6AF}" type="slidenum">
               <a:rPr lang="zh-CN" altLang="en-US" smtClean="0"/>
               <a:t>‹#›</a:t>
             </a:fld>
@@ -921,7 +921,7 @@
     </p:spTree>
     <p:extLst>
       <p:ext uri="{BB962C8B-B14F-4D97-AF65-F5344CB8AC3E}">
-        <p14:creationId xmlns:p14="http://schemas.microsoft.com/office/powerpoint/2010/main" val="1036489133"/>
+        <p14:creationId xmlns:p14="http://schemas.microsoft.com/office/powerpoint/2010/main" val="3118709225"/>
       </p:ext>
     </p:extLst>
   </p:cSld>
@@ -953,7 +953,7 @@
           <p:cNvPr id="2" name="标题 1">
             <a:extLst>
               <a:ext uri="{FF2B5EF4-FFF2-40B4-BE49-F238E27FC236}">
-                <a16:creationId xmlns:a16="http://schemas.microsoft.com/office/drawing/2014/main" id="{394B6998-22F4-F4E7-FF9B-A85F79A03B88}"/>
+                <a16:creationId xmlns:a16="http://schemas.microsoft.com/office/drawing/2014/main" id="{33932882-9ABB-92EF-4947-EAC13E66C858}"/>
               </a:ext>
             </a:extLst>
           </p:cNvPr>
@@ -990,7 +990,7 @@
           <p:cNvPr id="3" name="文本占位符 2">
             <a:extLst>
               <a:ext uri="{FF2B5EF4-FFF2-40B4-BE49-F238E27FC236}">
-                <a16:creationId xmlns:a16="http://schemas.microsoft.com/office/drawing/2014/main" id="{5EB52725-B4F9-A404-4EF1-27CEB26CFDCB}"/>
+                <a16:creationId xmlns:a16="http://schemas.microsoft.com/office/drawing/2014/main" id="{D4EA494F-49D2-727D-3DE3-225940DFF602}"/>
               </a:ext>
             </a:extLst>
           </p:cNvPr>
@@ -1115,7 +1115,7 @@
           <p:cNvPr id="4" name="日期占位符 3">
             <a:extLst>
               <a:ext uri="{FF2B5EF4-FFF2-40B4-BE49-F238E27FC236}">
-                <a16:creationId xmlns:a16="http://schemas.microsoft.com/office/drawing/2014/main" id="{23FB0CFB-BB50-0FD2-E9F2-059645229919}"/>
+                <a16:creationId xmlns:a16="http://schemas.microsoft.com/office/drawing/2014/main" id="{2FE21D6D-0765-0CD8-14F9-5E8166717BB0}"/>
               </a:ext>
             </a:extLst>
           </p:cNvPr>
@@ -1131,7 +1131,7 @@
           <a:bodyPr/>
           <a:lstStyle/>
           <a:p>
-            <a:fld id="{D45B5228-157C-4A61-B94F-7D39B61223F1}" type="datetimeFigureOut">
+            <a:fld id="{E153FE9F-3FEF-41E5-957E-25BB9AEA9EB6}" type="datetimeFigureOut">
               <a:rPr lang="zh-CN" altLang="en-US" smtClean="0"/>
               <a:t>2026/10/12</a:t>
             </a:fld>
@@ -1144,7 +1144,7 @@
           <p:cNvPr id="5" name="页脚占位符 4">
             <a:extLst>
               <a:ext uri="{FF2B5EF4-FFF2-40B4-BE49-F238E27FC236}">
-                <a16:creationId xmlns:a16="http://schemas.microsoft.com/office/drawing/2014/main" id="{D221D92D-621B-89B6-FA22-D1F4BB9CE402}"/>
+                <a16:creationId xmlns:a16="http://schemas.microsoft.com/office/drawing/2014/main" id="{ABA4E462-A09C-BA60-CEDE-A1125EEDF790}"/>
               </a:ext>
             </a:extLst>
           </p:cNvPr>
@@ -1169,7 +1169,7 @@
           <p:cNvPr id="6" name="灯片编号占位符 5">
             <a:extLst>
               <a:ext uri="{FF2B5EF4-FFF2-40B4-BE49-F238E27FC236}">
-                <a16:creationId xmlns:a16="http://schemas.microsoft.com/office/drawing/2014/main" id="{873FBFF9-DB11-BAE0-D495-7E3C1D99062C}"/>
+                <a16:creationId xmlns:a16="http://schemas.microsoft.com/office/drawing/2014/main" id="{F4BA550B-9F6F-6A3C-41AB-ABBE4BDC82E9}"/>
               </a:ext>
             </a:extLst>
           </p:cNvPr>
@@ -1185,7 +1185,7 @@
           <a:bodyPr/>
           <a:lstStyle/>
           <a:p>
-            <a:fld id="{00784516-1282-408B-B9C0-B358D54563E8}" type="slidenum">
+            <a:fld id="{AE1AC3C7-DE78-4B4F-A494-48BC2575B6AF}" type="slidenum">
               <a:rPr lang="zh-CN" altLang="en-US" smtClean="0"/>
               <a:t>‹#›</a:t>
             </a:fld>
@@ -1196,7 +1196,7 @@
     </p:spTree>
     <p:extLst>
       <p:ext uri="{BB962C8B-B14F-4D97-AF65-F5344CB8AC3E}">
-        <p14:creationId xmlns:p14="http://schemas.microsoft.com/office/powerpoint/2010/main" val="3456971964"/>
+        <p14:creationId xmlns:p14="http://schemas.microsoft.com/office/powerpoint/2010/main" val="2676746811"/>
       </p:ext>
     </p:extLst>
   </p:cSld>
@@ -1228,7 +1228,7 @@
           <p:cNvPr id="2" name="标题 1">
             <a:extLst>
               <a:ext uri="{FF2B5EF4-FFF2-40B4-BE49-F238E27FC236}">
-                <a16:creationId xmlns:a16="http://schemas.microsoft.com/office/drawing/2014/main" id="{718FBEC8-C5E6-091F-C9A7-574B0AF163DE}"/>
+                <a16:creationId xmlns:a16="http://schemas.microsoft.com/office/drawing/2014/main" id="{AAE1FF92-281A-3C49-30CB-984E2FB54D85}"/>
               </a:ext>
             </a:extLst>
           </p:cNvPr>
@@ -1256,7 +1256,7 @@
           <p:cNvPr id="3" name="内容占位符 2">
             <a:extLst>
               <a:ext uri="{FF2B5EF4-FFF2-40B4-BE49-F238E27FC236}">
-                <a16:creationId xmlns:a16="http://schemas.microsoft.com/office/drawing/2014/main" id="{44E99CB1-B0A4-B5C7-6350-46BE3A2DEC52}"/>
+                <a16:creationId xmlns:a16="http://schemas.microsoft.com/office/drawing/2014/main" id="{4E7C8716-E90B-7696-23FD-CE9636863FE7}"/>
               </a:ext>
             </a:extLst>
           </p:cNvPr>
@@ -1318,7 +1318,7 @@
           <p:cNvPr id="4" name="内容占位符 3">
             <a:extLst>
               <a:ext uri="{FF2B5EF4-FFF2-40B4-BE49-F238E27FC236}">
-                <a16:creationId xmlns:a16="http://schemas.microsoft.com/office/drawing/2014/main" id="{E7D07281-0D59-88AD-FAE0-F9C2524D5117}"/>
+                <a16:creationId xmlns:a16="http://schemas.microsoft.com/office/drawing/2014/main" id="{D3C7D8E3-0FDE-0AE1-0EBE-8B6D0D29EC5A}"/>
               </a:ext>
             </a:extLst>
           </p:cNvPr>
@@ -1380,7 +1380,7 @@
           <p:cNvPr id="5" name="日期占位符 4">
             <a:extLst>
               <a:ext uri="{FF2B5EF4-FFF2-40B4-BE49-F238E27FC236}">
-                <a16:creationId xmlns:a16="http://schemas.microsoft.com/office/drawing/2014/main" id="{C303D5AB-8352-EC1A-7764-6E69DE6F05CB}"/>
+                <a16:creationId xmlns:a16="http://schemas.microsoft.com/office/drawing/2014/main" id="{043C10A7-E1AE-C168-AE30-81CE78A95217}"/>
               </a:ext>
             </a:extLst>
           </p:cNvPr>
@@ -1396,7 +1396,7 @@
           <a:bodyPr/>
           <a:lstStyle/>
           <a:p>
-            <a:fld id="{D45B5228-157C-4A61-B94F-7D39B61223F1}" type="datetimeFigureOut">
+            <a:fld id="{E153FE9F-3FEF-41E5-957E-25BB9AEA9EB6}" type="datetimeFigureOut">
               <a:rPr lang="zh-CN" altLang="en-US" smtClean="0"/>
               <a:t>2026/10/12</a:t>
             </a:fld>
@@ -1409,7 +1409,7 @@
           <p:cNvPr id="6" name="页脚占位符 5">
             <a:extLst>
               <a:ext uri="{FF2B5EF4-FFF2-40B4-BE49-F238E27FC236}">
-                <a16:creationId xmlns:a16="http://schemas.microsoft.com/office/drawing/2014/main" id="{B1F17EFD-5263-BEF1-E44D-946303253707}"/>
+                <a16:creationId xmlns:a16="http://schemas.microsoft.com/office/drawing/2014/main" id="{68B2EEBA-0B69-BED4-007A-73F98050B44F}"/>
               </a:ext>
             </a:extLst>
           </p:cNvPr>
@@ -1434,7 +1434,7 @@
           <p:cNvPr id="7" name="灯片编号占位符 6">
             <a:extLst>
               <a:ext uri="{FF2B5EF4-FFF2-40B4-BE49-F238E27FC236}">
-                <a16:creationId xmlns:a16="http://schemas.microsoft.com/office/drawing/2014/main" id="{ABD2F245-05CD-BE41-3265-3406619037EE}"/>
+                <a16:creationId xmlns:a16="http://schemas.microsoft.com/office/drawing/2014/main" id="{8E9427B2-859C-8BE9-518F-5B60A51B21C5}"/>
               </a:ext>
             </a:extLst>
           </p:cNvPr>
@@ -1450,7 +1450,7 @@
           <a:bodyPr/>
           <a:lstStyle/>
           <a:p>
-            <a:fld id="{00784516-1282-408B-B9C0-B358D54563E8}" type="slidenum">
+            <a:fld id="{AE1AC3C7-DE78-4B4F-A494-48BC2575B6AF}" type="slidenum">
               <a:rPr lang="zh-CN" altLang="en-US" smtClean="0"/>
               <a:t>‹#›</a:t>
             </a:fld>
@@ -1461,7 +1461,7 @@
     </p:spTree>
     <p:extLst>
       <p:ext uri="{BB962C8B-B14F-4D97-AF65-F5344CB8AC3E}">
-        <p14:creationId xmlns:p14="http://schemas.microsoft.com/office/powerpoint/2010/main" val="62358065"/>
+        <p14:creationId xmlns:p14="http://schemas.microsoft.com/office/powerpoint/2010/main" val="2296480703"/>
       </p:ext>
     </p:extLst>
   </p:cSld>
@@ -1493,7 +1493,7 @@
           <p:cNvPr id="2" name="标题 1">
             <a:extLst>
               <a:ext uri="{FF2B5EF4-FFF2-40B4-BE49-F238E27FC236}">
-                <a16:creationId xmlns:a16="http://schemas.microsoft.com/office/drawing/2014/main" id="{63FA9CD0-C489-B84E-7356-B2F6B0AF9DF4}"/>
+                <a16:creationId xmlns:a16="http://schemas.microsoft.com/office/drawing/2014/main" id="{E25A8849-FE8B-CC68-3730-706CA53999B4}"/>
               </a:ext>
             </a:extLst>
           </p:cNvPr>
@@ -1526,7 +1526,7 @@
           <p:cNvPr id="3" name="文本占位符 2">
             <a:extLst>
               <a:ext uri="{FF2B5EF4-FFF2-40B4-BE49-F238E27FC236}">
-                <a16:creationId xmlns:a16="http://schemas.microsoft.com/office/drawing/2014/main" id="{51950534-E321-F938-A6F3-49DF895E24E0}"/>
+                <a16:creationId xmlns:a16="http://schemas.microsoft.com/office/drawing/2014/main" id="{3C8B2849-5527-DCA7-9E3A-A13B1DE3BB67}"/>
               </a:ext>
             </a:extLst>
           </p:cNvPr>
@@ -1597,7 +1597,7 @@
           <p:cNvPr id="4" name="内容占位符 3">
             <a:extLst>
               <a:ext uri="{FF2B5EF4-FFF2-40B4-BE49-F238E27FC236}">
-                <a16:creationId xmlns:a16="http://schemas.microsoft.com/office/drawing/2014/main" id="{83ACE7EA-8C86-4801-E880-D9277C498931}"/>
+                <a16:creationId xmlns:a16="http://schemas.microsoft.com/office/drawing/2014/main" id="{7BA51486-45BA-31DF-B83C-1E46F8EFACB3}"/>
               </a:ext>
             </a:extLst>
           </p:cNvPr>
@@ -1659,7 +1659,7 @@
           <p:cNvPr id="5" name="文本占位符 4">
             <a:extLst>
               <a:ext uri="{FF2B5EF4-FFF2-40B4-BE49-F238E27FC236}">
-                <a16:creationId xmlns:a16="http://schemas.microsoft.com/office/drawing/2014/main" id="{1545ACE0-5020-FB10-0E54-99DE1D4F33BB}"/>
+                <a16:creationId xmlns:a16="http://schemas.microsoft.com/office/drawing/2014/main" id="{B40E989D-4759-D104-633D-570207C23192}"/>
               </a:ext>
             </a:extLst>
           </p:cNvPr>
@@ -1730,7 +1730,7 @@
           <p:cNvPr id="6" name="内容占位符 5">
             <a:extLst>
               <a:ext uri="{FF2B5EF4-FFF2-40B4-BE49-F238E27FC236}">
-                <a16:creationId xmlns:a16="http://schemas.microsoft.com/office/drawing/2014/main" id="{16A91571-D518-7F77-3B34-9518E70BEF99}"/>
+                <a16:creationId xmlns:a16="http://schemas.microsoft.com/office/drawing/2014/main" id="{CF7BEAC4-1E23-377A-1F29-2F5FB9CF02D2}"/>
               </a:ext>
             </a:extLst>
           </p:cNvPr>
@@ -1792,7 +1792,7 @@
           <p:cNvPr id="7" name="日期占位符 6">
             <a:extLst>
               <a:ext uri="{FF2B5EF4-FFF2-40B4-BE49-F238E27FC236}">
-                <a16:creationId xmlns:a16="http://schemas.microsoft.com/office/drawing/2014/main" id="{98186888-18A6-2116-A81E-2C76F7BDB3D8}"/>
+                <a16:creationId xmlns:a16="http://schemas.microsoft.com/office/drawing/2014/main" id="{04293A50-1BEA-9E34-7060-893EFB94F1C2}"/>
               </a:ext>
             </a:extLst>
           </p:cNvPr>
@@ -1808,7 +1808,7 @@
           <a:bodyPr/>
           <a:lstStyle/>
           <a:p>
-            <a:fld id="{D45B5228-157C-4A61-B94F-7D39B61223F1}" type="datetimeFigureOut">
+            <a:fld id="{E153FE9F-3FEF-41E5-957E-25BB9AEA9EB6}" type="datetimeFigureOut">
               <a:rPr lang="zh-CN" altLang="en-US" smtClean="0"/>
               <a:t>2026/10/12</a:t>
             </a:fld>
@@ -1821,7 +1821,7 @@
           <p:cNvPr id="8" name="页脚占位符 7">
             <a:extLst>
               <a:ext uri="{FF2B5EF4-FFF2-40B4-BE49-F238E27FC236}">
-                <a16:creationId xmlns:a16="http://schemas.microsoft.com/office/drawing/2014/main" id="{6A2FEB5E-8646-4371-7DEF-6C31E0FA0AB2}"/>
+                <a16:creationId xmlns:a16="http://schemas.microsoft.com/office/drawing/2014/main" id="{80892717-E4FC-8CEC-2DED-116D3553DBAD}"/>
               </a:ext>
             </a:extLst>
           </p:cNvPr>
@@ -1846,7 +1846,7 @@
           <p:cNvPr id="9" name="灯片编号占位符 8">
             <a:extLst>
               <a:ext uri="{FF2B5EF4-FFF2-40B4-BE49-F238E27FC236}">
-                <a16:creationId xmlns:a16="http://schemas.microsoft.com/office/drawing/2014/main" id="{6C7A10EF-9E4C-D68D-7434-F458C1F3A29A}"/>
+                <a16:creationId xmlns:a16="http://schemas.microsoft.com/office/drawing/2014/main" id="{D922528E-131F-4A87-DE84-229B53C0C08A}"/>
               </a:ext>
             </a:extLst>
           </p:cNvPr>
@@ -1862,7 +1862,7 @@
           <a:bodyPr/>
           <a:lstStyle/>
           <a:p>
-            <a:fld id="{00784516-1282-408B-B9C0-B358D54563E8}" type="slidenum">
+            <a:fld id="{AE1AC3C7-DE78-4B4F-A494-48BC2575B6AF}" type="slidenum">
               <a:rPr lang="zh-CN" altLang="en-US" smtClean="0"/>
               <a:t>‹#›</a:t>
             </a:fld>
@@ -1873,7 +1873,7 @@
     </p:spTree>
     <p:extLst>
       <p:ext uri="{BB962C8B-B14F-4D97-AF65-F5344CB8AC3E}">
-        <p14:creationId xmlns:p14="http://schemas.microsoft.com/office/powerpoint/2010/main" val="4086919414"/>
+        <p14:creationId xmlns:p14="http://schemas.microsoft.com/office/powerpoint/2010/main" val="205929245"/>
       </p:ext>
     </p:extLst>
   </p:cSld>
@@ -1905,7 +1905,7 @@
           <p:cNvPr id="2" name="标题 1">
             <a:extLst>
               <a:ext uri="{FF2B5EF4-FFF2-40B4-BE49-F238E27FC236}">
-                <a16:creationId xmlns:a16="http://schemas.microsoft.com/office/drawing/2014/main" id="{AE01F46B-A894-F03B-51ED-02566D76D10D}"/>
+                <a16:creationId xmlns:a16="http://schemas.microsoft.com/office/drawing/2014/main" id="{C6CDEACB-A09C-8778-5DF7-0B240A03E62E}"/>
               </a:ext>
             </a:extLst>
           </p:cNvPr>
@@ -1933,7 +1933,7 @@
           <p:cNvPr id="3" name="日期占位符 2">
             <a:extLst>
               <a:ext uri="{FF2B5EF4-FFF2-40B4-BE49-F238E27FC236}">
-                <a16:creationId xmlns:a16="http://schemas.microsoft.com/office/drawing/2014/main" id="{30FF3898-A792-B782-1CAC-1FB3B6E47E28}"/>
+                <a16:creationId xmlns:a16="http://schemas.microsoft.com/office/drawing/2014/main" id="{F91770AC-0475-8AEB-0574-03C59D091AB4}"/>
               </a:ext>
             </a:extLst>
           </p:cNvPr>
@@ -1949,7 +1949,7 @@
           <a:bodyPr/>
           <a:lstStyle/>
           <a:p>
-            <a:fld id="{D45B5228-157C-4A61-B94F-7D39B61223F1}" type="datetimeFigureOut">
+            <a:fld id="{E153FE9F-3FEF-41E5-957E-25BB9AEA9EB6}" type="datetimeFigureOut">
               <a:rPr lang="zh-CN" altLang="en-US" smtClean="0"/>
               <a:t>2026/10/12</a:t>
             </a:fld>
@@ -1962,7 +1962,7 @@
           <p:cNvPr id="4" name="页脚占位符 3">
             <a:extLst>
               <a:ext uri="{FF2B5EF4-FFF2-40B4-BE49-F238E27FC236}">
-                <a16:creationId xmlns:a16="http://schemas.microsoft.com/office/drawing/2014/main" id="{1DFE6757-0D15-074A-E60C-2980B99125D3}"/>
+                <a16:creationId xmlns:a16="http://schemas.microsoft.com/office/drawing/2014/main" id="{47FC28E8-F387-FB52-B780-761D483787F0}"/>
               </a:ext>
             </a:extLst>
           </p:cNvPr>
@@ -1987,7 +1987,7 @@
           <p:cNvPr id="5" name="灯片编号占位符 4">
             <a:extLst>
               <a:ext uri="{FF2B5EF4-FFF2-40B4-BE49-F238E27FC236}">
-                <a16:creationId xmlns:a16="http://schemas.microsoft.com/office/drawing/2014/main" id="{30399D30-B9C8-3DC2-E916-433BDCD93465}"/>
+                <a16:creationId xmlns:a16="http://schemas.microsoft.com/office/drawing/2014/main" id="{D4E1C96E-2B75-4000-A742-A4AB10CC9A93}"/>
               </a:ext>
             </a:extLst>
           </p:cNvPr>
@@ -2003,7 +2003,7 @@
           <a:bodyPr/>
           <a:lstStyle/>
           <a:p>
-            <a:fld id="{00784516-1282-408B-B9C0-B358D54563E8}" type="slidenum">
+            <a:fld id="{AE1AC3C7-DE78-4B4F-A494-48BC2575B6AF}" type="slidenum">
               <a:rPr lang="zh-CN" altLang="en-US" smtClean="0"/>
               <a:t>‹#›</a:t>
             </a:fld>
@@ -2014,7 +2014,7 @@
     </p:spTree>
     <p:extLst>
       <p:ext uri="{BB962C8B-B14F-4D97-AF65-F5344CB8AC3E}">
-        <p14:creationId xmlns:p14="http://schemas.microsoft.com/office/powerpoint/2010/main" val="798213487"/>
+        <p14:creationId xmlns:p14="http://schemas.microsoft.com/office/powerpoint/2010/main" val="577997952"/>
       </p:ext>
     </p:extLst>
   </p:cSld>
@@ -2046,7 +2046,7 @@
           <p:cNvPr id="2" name="日期占位符 1">
             <a:extLst>
               <a:ext uri="{FF2B5EF4-FFF2-40B4-BE49-F238E27FC236}">
-                <a16:creationId xmlns:a16="http://schemas.microsoft.com/office/drawing/2014/main" id="{53EB975C-EB1A-F198-003E-08957BBB85C5}"/>
+                <a16:creationId xmlns:a16="http://schemas.microsoft.com/office/drawing/2014/main" id="{A25BB570-92A3-EFBB-72AF-D52CE6BCE45D}"/>
               </a:ext>
             </a:extLst>
           </p:cNvPr>
@@ -2062,7 +2062,7 @@
           <a:bodyPr/>
           <a:lstStyle/>
           <a:p>
-            <a:fld id="{D45B5228-157C-4A61-B94F-7D39B61223F1}" type="datetimeFigureOut">
+            <a:fld id="{E153FE9F-3FEF-41E5-957E-25BB9AEA9EB6}" type="datetimeFigureOut">
               <a:rPr lang="zh-CN" altLang="en-US" smtClean="0"/>
               <a:t>2026/10/12</a:t>
             </a:fld>
@@ -2075,7 +2075,7 @@
           <p:cNvPr id="3" name="页脚占位符 2">
             <a:extLst>
               <a:ext uri="{FF2B5EF4-FFF2-40B4-BE49-F238E27FC236}">
-                <a16:creationId xmlns:a16="http://schemas.microsoft.com/office/drawing/2014/main" id="{0837CA1B-5121-3984-AAD2-C947C0C1BF70}"/>
+                <a16:creationId xmlns:a16="http://schemas.microsoft.com/office/drawing/2014/main" id="{8E31A7AD-28A0-D3FB-D80B-734ACE3AC380}"/>
               </a:ext>
             </a:extLst>
           </p:cNvPr>
@@ -2100,7 +2100,7 @@
           <p:cNvPr id="4" name="灯片编号占位符 3">
             <a:extLst>
               <a:ext uri="{FF2B5EF4-FFF2-40B4-BE49-F238E27FC236}">
-                <a16:creationId xmlns:a16="http://schemas.microsoft.com/office/drawing/2014/main" id="{E3279477-C97C-DBA0-71F6-60BE97AA6E6A}"/>
+                <a16:creationId xmlns:a16="http://schemas.microsoft.com/office/drawing/2014/main" id="{68FB9353-1356-2651-5C26-42C8E1E440B9}"/>
               </a:ext>
             </a:extLst>
           </p:cNvPr>
@@ -2116,7 +2116,7 @@
           <a:bodyPr/>
           <a:lstStyle/>
           <a:p>
-            <a:fld id="{00784516-1282-408B-B9C0-B358D54563E8}" type="slidenum">
+            <a:fld id="{AE1AC3C7-DE78-4B4F-A494-48BC2575B6AF}" type="slidenum">
               <a:rPr lang="zh-CN" altLang="en-US" smtClean="0"/>
               <a:t>‹#›</a:t>
             </a:fld>
@@ -2127,7 +2127,7 @@
     </p:spTree>
     <p:extLst>
       <p:ext uri="{BB962C8B-B14F-4D97-AF65-F5344CB8AC3E}">
-        <p14:creationId xmlns:p14="http://schemas.microsoft.com/office/powerpoint/2010/main" val="3791927534"/>
+        <p14:creationId xmlns:p14="http://schemas.microsoft.com/office/powerpoint/2010/main" val="1623924852"/>
       </p:ext>
     </p:extLst>
   </p:cSld>
@@ -2159,7 +2159,7 @@
           <p:cNvPr id="2" name="标题 1">
             <a:extLst>
               <a:ext uri="{FF2B5EF4-FFF2-40B4-BE49-F238E27FC236}">
-                <a16:creationId xmlns:a16="http://schemas.microsoft.com/office/drawing/2014/main" id="{0F60AEFE-9E62-DE2A-285F-FB1FCC75F267}"/>
+                <a16:creationId xmlns:a16="http://schemas.microsoft.com/office/drawing/2014/main" id="{B0052245-B354-D95A-CCA9-6129899016F4}"/>
               </a:ext>
             </a:extLst>
           </p:cNvPr>
@@ -2196,7 +2196,7 @@
           <p:cNvPr id="3" name="内容占位符 2">
             <a:extLst>
               <a:ext uri="{FF2B5EF4-FFF2-40B4-BE49-F238E27FC236}">
-                <a16:creationId xmlns:a16="http://schemas.microsoft.com/office/drawing/2014/main" id="{EEB24B2A-26D3-2F3D-2233-01E79D19E60A}"/>
+                <a16:creationId xmlns:a16="http://schemas.microsoft.com/office/drawing/2014/main" id="{9D31DFE4-8B50-D36A-D953-AFF60E4503F7}"/>
               </a:ext>
             </a:extLst>
           </p:cNvPr>
@@ -2286,7 +2286,7 @@
           <p:cNvPr id="4" name="文本占位符 3">
             <a:extLst>
               <a:ext uri="{FF2B5EF4-FFF2-40B4-BE49-F238E27FC236}">
-                <a16:creationId xmlns:a16="http://schemas.microsoft.com/office/drawing/2014/main" id="{391069AB-52AA-AED7-B8C2-21643CBB50F0}"/>
+                <a16:creationId xmlns:a16="http://schemas.microsoft.com/office/drawing/2014/main" id="{AF647FF8-9189-7B00-085C-C6013766F872}"/>
               </a:ext>
             </a:extLst>
           </p:cNvPr>
@@ -2357,7 +2357,7 @@
           <p:cNvPr id="5" name="日期占位符 4">
             <a:extLst>
               <a:ext uri="{FF2B5EF4-FFF2-40B4-BE49-F238E27FC236}">
-                <a16:creationId xmlns:a16="http://schemas.microsoft.com/office/drawing/2014/main" id="{28991083-CE0E-B43A-A577-67922B85185B}"/>
+                <a16:creationId xmlns:a16="http://schemas.microsoft.com/office/drawing/2014/main" id="{74A933BB-90E8-7C21-C36C-62B3B869AAF0}"/>
               </a:ext>
             </a:extLst>
           </p:cNvPr>
@@ -2373,7 +2373,7 @@
           <a:bodyPr/>
           <a:lstStyle/>
           <a:p>
-            <a:fld id="{D45B5228-157C-4A61-B94F-7D39B61223F1}" type="datetimeFigureOut">
+            <a:fld id="{E153FE9F-3FEF-41E5-957E-25BB9AEA9EB6}" type="datetimeFigureOut">
               <a:rPr lang="zh-CN" altLang="en-US" smtClean="0"/>
               <a:t>2026/10/12</a:t>
             </a:fld>
@@ -2386,7 +2386,7 @@
           <p:cNvPr id="6" name="页脚占位符 5">
             <a:extLst>
               <a:ext uri="{FF2B5EF4-FFF2-40B4-BE49-F238E27FC236}">
-                <a16:creationId xmlns:a16="http://schemas.microsoft.com/office/drawing/2014/main" id="{E1D05F64-4C6D-E35E-6862-930E858B7643}"/>
+                <a16:creationId xmlns:a16="http://schemas.microsoft.com/office/drawing/2014/main" id="{F2A9A438-A5FC-70FF-0D73-35DDA11E4ED5}"/>
               </a:ext>
             </a:extLst>
           </p:cNvPr>
@@ -2411,7 +2411,7 @@
           <p:cNvPr id="7" name="灯片编号占位符 6">
             <a:extLst>
               <a:ext uri="{FF2B5EF4-FFF2-40B4-BE49-F238E27FC236}">
-                <a16:creationId xmlns:a16="http://schemas.microsoft.com/office/drawing/2014/main" id="{E12A3359-35FF-4102-8DF1-D5BCEDBA7372}"/>
+                <a16:creationId xmlns:a16="http://schemas.microsoft.com/office/drawing/2014/main" id="{658DECF0-0CDE-DCF7-F740-A898B994F830}"/>
               </a:ext>
             </a:extLst>
           </p:cNvPr>
@@ -2427,7 +2427,7 @@
           <a:bodyPr/>
           <a:lstStyle/>
           <a:p>
-            <a:fld id="{00784516-1282-408B-B9C0-B358D54563E8}" type="slidenum">
+            <a:fld id="{AE1AC3C7-DE78-4B4F-A494-48BC2575B6AF}" type="slidenum">
               <a:rPr lang="zh-CN" altLang="en-US" smtClean="0"/>
               <a:t>‹#›</a:t>
             </a:fld>
@@ -2438,7 +2438,7 @@
     </p:spTree>
     <p:extLst>
       <p:ext uri="{BB962C8B-B14F-4D97-AF65-F5344CB8AC3E}">
-        <p14:creationId xmlns:p14="http://schemas.microsoft.com/office/powerpoint/2010/main" val="4010456805"/>
+        <p14:creationId xmlns:p14="http://schemas.microsoft.com/office/powerpoint/2010/main" val="3327682044"/>
       </p:ext>
     </p:extLst>
   </p:cSld>
@@ -2470,7 +2470,7 @@
           <p:cNvPr id="2" name="标题 1">
             <a:extLst>
               <a:ext uri="{FF2B5EF4-FFF2-40B4-BE49-F238E27FC236}">
-                <a16:creationId xmlns:a16="http://schemas.microsoft.com/office/drawing/2014/main" id="{1DBAA588-4460-164A-19A6-4E7A7B0B62B0}"/>
+                <a16:creationId xmlns:a16="http://schemas.microsoft.com/office/drawing/2014/main" id="{57FCB120-12C6-DEF6-5E8C-B2B1AE25CFAF}"/>
               </a:ext>
             </a:extLst>
           </p:cNvPr>
@@ -2507,7 +2507,7 @@
           <p:cNvPr id="3" name="图片占位符 2">
             <a:extLst>
               <a:ext uri="{FF2B5EF4-FFF2-40B4-BE49-F238E27FC236}">
-                <a16:creationId xmlns:a16="http://schemas.microsoft.com/office/drawing/2014/main" id="{724611C2-5725-4062-8BF8-F8CDEC4D6563}"/>
+                <a16:creationId xmlns:a16="http://schemas.microsoft.com/office/drawing/2014/main" id="{40A1CC42-A1C6-6C32-80C7-6CBF4B95980F}"/>
               </a:ext>
             </a:extLst>
           </p:cNvPr>
@@ -2574,7 +2574,7 @@
           <p:cNvPr id="4" name="文本占位符 3">
             <a:extLst>
               <a:ext uri="{FF2B5EF4-FFF2-40B4-BE49-F238E27FC236}">
-                <a16:creationId xmlns:a16="http://schemas.microsoft.com/office/drawing/2014/main" id="{4F1981FD-1216-4595-909C-0476D1678B8C}"/>
+                <a16:creationId xmlns:a16="http://schemas.microsoft.com/office/drawing/2014/main" id="{32A66423-BD85-D92C-5D85-DD936A731F82}"/>
               </a:ext>
             </a:extLst>
           </p:cNvPr>
@@ -2645,7 +2645,7 @@
           <p:cNvPr id="5" name="日期占位符 4">
             <a:extLst>
               <a:ext uri="{FF2B5EF4-FFF2-40B4-BE49-F238E27FC236}">
-                <a16:creationId xmlns:a16="http://schemas.microsoft.com/office/drawing/2014/main" id="{F2E177DD-A064-D9BA-02E6-4C3E60036F48}"/>
+                <a16:creationId xmlns:a16="http://schemas.microsoft.com/office/drawing/2014/main" id="{45E46093-89C6-901B-6D98-19E04CDF58B9}"/>
               </a:ext>
             </a:extLst>
           </p:cNvPr>
@@ -2661,7 +2661,7 @@
           <a:bodyPr/>
           <a:lstStyle/>
           <a:p>
-            <a:fld id="{D45B5228-157C-4A61-B94F-7D39B61223F1}" type="datetimeFigureOut">
+            <a:fld id="{E153FE9F-3FEF-41E5-957E-25BB9AEA9EB6}" type="datetimeFigureOut">
               <a:rPr lang="zh-CN" altLang="en-US" smtClean="0"/>
               <a:t>2026/10/12</a:t>
             </a:fld>
@@ -2674,7 +2674,7 @@
           <p:cNvPr id="6" name="页脚占位符 5">
             <a:extLst>
               <a:ext uri="{FF2B5EF4-FFF2-40B4-BE49-F238E27FC236}">
-                <a16:creationId xmlns:a16="http://schemas.microsoft.com/office/drawing/2014/main" id="{296270C1-6FAC-DE7A-E076-CCA26D4031C3}"/>
+                <a16:creationId xmlns:a16="http://schemas.microsoft.com/office/drawing/2014/main" id="{0CB7344E-E208-E95D-D0E9-7BBD23783AEE}"/>
               </a:ext>
             </a:extLst>
           </p:cNvPr>
@@ -2699,7 +2699,7 @@
           <p:cNvPr id="7" name="灯片编号占位符 6">
             <a:extLst>
               <a:ext uri="{FF2B5EF4-FFF2-40B4-BE49-F238E27FC236}">
-                <a16:creationId xmlns:a16="http://schemas.microsoft.com/office/drawing/2014/main" id="{1ABC33BC-6045-4634-C962-B2FD4F1E088E}"/>
+                <a16:creationId xmlns:a16="http://schemas.microsoft.com/office/drawing/2014/main" id="{62E9CE1C-1B37-C062-64D9-77ECC860F009}"/>
               </a:ext>
             </a:extLst>
           </p:cNvPr>
@@ -2715,7 +2715,7 @@
           <a:bodyPr/>
           <a:lstStyle/>
           <a:p>
-            <a:fld id="{00784516-1282-408B-B9C0-B358D54563E8}" type="slidenum">
+            <a:fld id="{AE1AC3C7-DE78-4B4F-A494-48BC2575B6AF}" type="slidenum">
               <a:rPr lang="zh-CN" altLang="en-US" smtClean="0"/>
               <a:t>‹#›</a:t>
             </a:fld>
@@ -2726,7 +2726,7 @@
     </p:spTree>
     <p:extLst>
       <p:ext uri="{BB962C8B-B14F-4D97-AF65-F5344CB8AC3E}">
-        <p14:creationId xmlns:p14="http://schemas.microsoft.com/office/powerpoint/2010/main" val="1633626511"/>
+        <p14:creationId xmlns:p14="http://schemas.microsoft.com/office/powerpoint/2010/main" val="3670405059"/>
       </p:ext>
     </p:extLst>
   </p:cSld>
@@ -2763,7 +2763,7 @@
           <p:cNvPr id="2" name="标题占位符 1">
             <a:extLst>
               <a:ext uri="{FF2B5EF4-FFF2-40B4-BE49-F238E27FC236}">
-                <a16:creationId xmlns:a16="http://schemas.microsoft.com/office/drawing/2014/main" id="{1813F6A0-5858-44CE-D38E-F21AF068ECFA}"/>
+                <a16:creationId xmlns:a16="http://schemas.microsoft.com/office/drawing/2014/main" id="{CBE50F1C-2DB4-6900-853D-393E10E036A4}"/>
               </a:ext>
             </a:extLst>
           </p:cNvPr>
@@ -2801,7 +2801,7 @@
           <p:cNvPr id="3" name="文本占位符 2">
             <a:extLst>
               <a:ext uri="{FF2B5EF4-FFF2-40B4-BE49-F238E27FC236}">
-                <a16:creationId xmlns:a16="http://schemas.microsoft.com/office/drawing/2014/main" id="{E6E55671-2DEE-375D-2390-D89409F1AE5A}"/>
+                <a16:creationId xmlns:a16="http://schemas.microsoft.com/office/drawing/2014/main" id="{15CB5F47-B896-1588-1D00-3CD8C8B60729}"/>
               </a:ext>
             </a:extLst>
           </p:cNvPr>
@@ -2868,7 +2868,7 @@
           <p:cNvPr id="4" name="日期占位符 3">
             <a:extLst>
               <a:ext uri="{FF2B5EF4-FFF2-40B4-BE49-F238E27FC236}">
-                <a16:creationId xmlns:a16="http://schemas.microsoft.com/office/drawing/2014/main" id="{655FE78C-A591-9C18-6D43-090AF94BD2A8}"/>
+                <a16:creationId xmlns:a16="http://schemas.microsoft.com/office/drawing/2014/main" id="{91FBF167-183D-87E5-BAE2-295F65D193A0}"/>
               </a:ext>
             </a:extLst>
           </p:cNvPr>
@@ -2902,7 +2902,7 @@
             </a:lvl1pPr>
           </a:lstStyle>
           <a:p>
-            <a:fld id="{D45B5228-157C-4A61-B94F-7D39B61223F1}" type="datetimeFigureOut">
+            <a:fld id="{E153FE9F-3FEF-41E5-957E-25BB9AEA9EB6}" type="datetimeFigureOut">
               <a:rPr lang="zh-CN" altLang="en-US" smtClean="0"/>
               <a:t>2026/10/12</a:t>
             </a:fld>
@@ -2915,7 +2915,7 @@
           <p:cNvPr id="5" name="页脚占位符 4">
             <a:extLst>
               <a:ext uri="{FF2B5EF4-FFF2-40B4-BE49-F238E27FC236}">
-                <a16:creationId xmlns:a16="http://schemas.microsoft.com/office/drawing/2014/main" id="{1CF09493-AA56-026D-F944-C8C8152C87DF}"/>
+                <a16:creationId xmlns:a16="http://schemas.microsoft.com/office/drawing/2014/main" id="{12EF8C21-4093-1325-20FE-FEDC470F8F67}"/>
               </a:ext>
             </a:extLst>
           </p:cNvPr>
@@ -2958,7 +2958,7 @@
           <p:cNvPr id="6" name="灯片编号占位符 5">
             <a:extLst>
               <a:ext uri="{FF2B5EF4-FFF2-40B4-BE49-F238E27FC236}">
-                <a16:creationId xmlns:a16="http://schemas.microsoft.com/office/drawing/2014/main" id="{73F105D1-C00C-B075-E9C7-369E220FF459}"/>
+                <a16:creationId xmlns:a16="http://schemas.microsoft.com/office/drawing/2014/main" id="{1A871F7F-C592-AD53-B1B0-672E9CB8EC56}"/>
               </a:ext>
             </a:extLst>
           </p:cNvPr>
@@ -2992,7 +2992,7 @@
             </a:lvl1pPr>
           </a:lstStyle>
           <a:p>
-            <a:fld id="{00784516-1282-408B-B9C0-B358D54563E8}" type="slidenum">
+            <a:fld id="{AE1AC3C7-DE78-4B4F-A494-48BC2575B6AF}" type="slidenum">
               <a:rPr lang="zh-CN" altLang="en-US" smtClean="0"/>
               <a:t>‹#›</a:t>
             </a:fld>
@@ -3003,7 +3003,7 @@
     </p:spTree>
     <p:extLst>
       <p:ext uri="{BB962C8B-B14F-4D97-AF65-F5344CB8AC3E}">
-        <p14:creationId xmlns:p14="http://schemas.microsoft.com/office/powerpoint/2010/main" val="2807299778"/>
+        <p14:creationId xmlns:p14="http://schemas.microsoft.com/office/powerpoint/2010/main" val="2666403038"/>
       </p:ext>
     </p:extLst>
   </p:cSld>
@@ -3326,7 +3326,7 @@
           <p:cNvPr id="2" name="文本框 1">
             <a:extLst>
               <a:ext uri="{FF2B5EF4-FFF2-40B4-BE49-F238E27FC236}">
-                <a16:creationId xmlns:a16="http://schemas.microsoft.com/office/drawing/2014/main" id="{6FD1BE4B-5E21-D155-8C57-9D0CF418EF48}"/>
+                <a16:creationId xmlns:a16="http://schemas.microsoft.com/office/drawing/2014/main" id="{35D5E19E-E070-C487-DDBE-31D681F804F7}"/>
               </a:ext>
             </a:extLst>
           </p:cNvPr>
@@ -3377,7 +3377,7 @@
           <p:cNvPr id="3" name="文本框 2">
             <a:extLst>
               <a:ext uri="{FF2B5EF4-FFF2-40B4-BE49-F238E27FC236}">
-                <a16:creationId xmlns:a16="http://schemas.microsoft.com/office/drawing/2014/main" id="{1F38F0F5-1BC9-7C31-01FF-4A2A837E472E}"/>
+                <a16:creationId xmlns:a16="http://schemas.microsoft.com/office/drawing/2014/main" id="{1D943108-047F-6D9E-C7F9-518D958F9B3F}"/>
               </a:ext>
             </a:extLst>
           </p:cNvPr>
@@ -3431,7 +3431,7 @@
           <p:cNvPr id="4" name="文本框 3">
             <a:extLst>
               <a:ext uri="{FF2B5EF4-FFF2-40B4-BE49-F238E27FC236}">
-                <a16:creationId xmlns:a16="http://schemas.microsoft.com/office/drawing/2014/main" id="{C89D64E2-9302-B16D-B94A-E8185196031E}"/>
+                <a16:creationId xmlns:a16="http://schemas.microsoft.com/office/drawing/2014/main" id="{64656C95-22AB-127A-F9BC-7BC17A510FC2}"/>
               </a:ext>
             </a:extLst>
           </p:cNvPr>
@@ -3485,7 +3485,7 @@
           <p:cNvPr id="5" name="文本框 4">
             <a:extLst>
               <a:ext uri="{FF2B5EF4-FFF2-40B4-BE49-F238E27FC236}">
-                <a16:creationId xmlns:a16="http://schemas.microsoft.com/office/drawing/2014/main" id="{4BA37329-7D27-8090-AE6E-40201361EA91}"/>
+                <a16:creationId xmlns:a16="http://schemas.microsoft.com/office/drawing/2014/main" id="{ADC597A2-DC23-3743-ECAB-F71A9E211E55}"/>
               </a:ext>
             </a:extLst>
           </p:cNvPr>
@@ -3539,7 +3539,7 @@
           <p:cNvPr id="6" name="文本框 5">
             <a:extLst>
               <a:ext uri="{FF2B5EF4-FFF2-40B4-BE49-F238E27FC236}">
-                <a16:creationId xmlns:a16="http://schemas.microsoft.com/office/drawing/2014/main" id="{5A59C7D4-B4C8-27C0-86C6-7E19D1B22BF5}"/>
+                <a16:creationId xmlns:a16="http://schemas.microsoft.com/office/drawing/2014/main" id="{A5B04F21-BF56-2F86-335E-5B9C87C0736B}"/>
               </a:ext>
             </a:extLst>
           </p:cNvPr>
@@ -3585,10 +3585,163 @@
           </a:p>
         </p:txBody>
       </p:sp>
+      <p:sp>
+        <p:nvSpPr>
+          <p:cNvPr id="7" name="文本框 6">
+            <a:extLst>
+              <a:ext uri="{FF2B5EF4-FFF2-40B4-BE49-F238E27FC236}">
+                <a16:creationId xmlns:a16="http://schemas.microsoft.com/office/drawing/2014/main" id="{E18BCC07-F3A7-E7A4-F3C3-A07F8CB57150}"/>
+              </a:ext>
+            </a:extLst>
+          </p:cNvPr>
+          <p:cNvSpPr txBox="1"/>
+          <p:nvPr/>
+        </p:nvSpPr>
+        <p:spPr>
+          <a:xfrm>
+            <a:off x="254000" y="5334000"/>
+            <a:ext cx="5588000" cy="635000"/>
+          </a:xfrm>
+          <a:prstGeom prst="rect">
+            <a:avLst/>
+          </a:prstGeom>
+          <a:noFill/>
+          <a:ln w="6350">
+            <a:solidFill>
+              <a:srgbClr val="C8C8C8"/>
+            </a:solidFill>
+          </a:ln>
+        </p:spPr>
+        <p:txBody>
+          <a:bodyPr vert="horz" wrap="square" rtlCol="0" anchor="t">
+            <a:noAutofit/>
+          </a:bodyPr>
+          <a:lstStyle/>
+          <a:p>
+            <a:r>
+              <a:rPr lang="zh-CN" altLang="en-US">
+                <a:latin typeface="思源黑体 CN Light"/>
+              </a:rPr>
+              <a:t>缺失字体测试 中文 </a:t>
+            </a:r>
+            <a:r>
+              <a:rPr lang="en-US" altLang="zh-CN">
+                <a:latin typeface="思源黑体 CN Light"/>
+              </a:rPr>
+              <a:t>English 123</a:t>
+            </a:r>
+            <a:endParaRPr lang="zh-CN" altLang="en-US">
+              <a:latin typeface="思源黑体 CN Light"/>
+            </a:endParaRPr>
+          </a:p>
+        </p:txBody>
+      </p:sp>
+      <p:sp>
+        <p:nvSpPr>
+          <p:cNvPr id="8" name="文本框 7">
+            <a:extLst>
+              <a:ext uri="{FF2B5EF4-FFF2-40B4-BE49-F238E27FC236}">
+                <a16:creationId xmlns:a16="http://schemas.microsoft.com/office/drawing/2014/main" id="{44E2140E-FE61-3921-3F37-83AED7607FE4}"/>
+              </a:ext>
+            </a:extLst>
+          </p:cNvPr>
+          <p:cNvSpPr txBox="1"/>
+          <p:nvPr/>
+        </p:nvSpPr>
+        <p:spPr>
+          <a:xfrm>
+            <a:off x="6096000" y="5334000"/>
+            <a:ext cx="5588000" cy="635000"/>
+          </a:xfrm>
+          <a:prstGeom prst="rect">
+            <a:avLst/>
+          </a:prstGeom>
+          <a:noFill/>
+          <a:ln w="6350">
+            <a:solidFill>
+              <a:srgbClr val="C8C8C8"/>
+            </a:solidFill>
+          </a:ln>
+        </p:spPr>
+        <p:txBody>
+          <a:bodyPr vert="horz" wrap="square" rtlCol="0" anchor="t">
+            <a:noAutofit/>
+          </a:bodyPr>
+          <a:lstStyle/>
+          <a:p>
+            <a:r>
+              <a:rPr lang="zh-CN" altLang="en-US">
+                <a:latin typeface="思源黑体 CN Bold"/>
+              </a:rPr>
+              <a:t>缺失字体测试 中文 </a:t>
+            </a:r>
+            <a:r>
+              <a:rPr lang="en-US" altLang="zh-CN">
+                <a:latin typeface="思源黑体 CN Bold"/>
+              </a:rPr>
+              <a:t>English 123</a:t>
+            </a:r>
+            <a:endParaRPr lang="zh-CN" altLang="en-US">
+              <a:latin typeface="思源黑体 CN Bold"/>
+            </a:endParaRPr>
+          </a:p>
+        </p:txBody>
+      </p:sp>
+      <p:sp>
+        <p:nvSpPr>
+          <p:cNvPr id="9" name="文本框 8">
+            <a:extLst>
+              <a:ext uri="{FF2B5EF4-FFF2-40B4-BE49-F238E27FC236}">
+                <a16:creationId xmlns:a16="http://schemas.microsoft.com/office/drawing/2014/main" id="{2A8DE0D4-5790-456B-B8D3-117C731D15BD}"/>
+              </a:ext>
+            </a:extLst>
+          </p:cNvPr>
+          <p:cNvSpPr txBox="1"/>
+          <p:nvPr/>
+        </p:nvSpPr>
+        <p:spPr>
+          <a:xfrm>
+            <a:off x="254000" y="6096000"/>
+            <a:ext cx="5588000" cy="635000"/>
+          </a:xfrm>
+          <a:prstGeom prst="rect">
+            <a:avLst/>
+          </a:prstGeom>
+          <a:noFill/>
+          <a:ln w="6350">
+            <a:solidFill>
+              <a:srgbClr val="C8C8C8"/>
+            </a:solidFill>
+          </a:ln>
+        </p:spPr>
+        <p:txBody>
+          <a:bodyPr vert="horz" wrap="square" rtlCol="0" anchor="t">
+            <a:noAutofit/>
+          </a:bodyPr>
+          <a:lstStyle/>
+          <a:p>
+            <a:r>
+              <a:rPr lang="zh-CN" altLang="en-US">
+                <a:latin typeface="某某黑体"/>
+              </a:rPr>
+              <a:t>缺失字体测试 中文 </a:t>
+            </a:r>
+            <a:r>
+              <a:rPr lang="en-US" altLang="zh-CN">
+                <a:latin typeface="某某黑体"/>
+              </a:rPr>
+              <a:t>English 123</a:t>
+            </a:r>
+            <a:endParaRPr lang="zh-CN" altLang="en-US">
+              <a:latin typeface="某某黑体"/>
+            </a:endParaRPr>
+          </a:p>
+        </p:txBody>
+      </p:sp>
     </p:spTree>
     <p:extLst>
       <p:ext uri="{BB962C8B-B14F-4D97-AF65-F5344CB8AC3E}">
-        <p14:creationId xmlns:p14="http://schemas.microsoft.com/office/powerpoint/2010/main" val="3980175613"/>
+        <p14:creationId xmlns:p14="http://schemas.microsoft.com/office/powerpoint/2010/main" val="1668841438"/>
       </p:ext>
     </p:extLst>
   </p:cSld>
